--- a/docs/Perf Test Harness-Overview.pptx
+++ b/docs/Perf Test Harness-Overview.pptx
@@ -7,27 +7,26 @@
     <p:sldMasterId id="2147483675" r:id="rId3"/>
   </p:sldMasterIdLst>
   <p:notesMasterIdLst>
-    <p:notesMasterId r:id="rId22"/>
+    <p:notesMasterId r:id="rId21"/>
   </p:notesMasterIdLst>
   <p:sldIdLst>
     <p:sldId id="272" r:id="rId4"/>
     <p:sldId id="273" r:id="rId5"/>
-    <p:sldId id="289" r:id="rId6"/>
-    <p:sldId id="274" r:id="rId7"/>
-    <p:sldId id="275" r:id="rId8"/>
-    <p:sldId id="276" r:id="rId9"/>
-    <p:sldId id="277" r:id="rId10"/>
-    <p:sldId id="279" r:id="rId11"/>
-    <p:sldId id="281" r:id="rId12"/>
-    <p:sldId id="280" r:id="rId13"/>
-    <p:sldId id="278" r:id="rId14"/>
-    <p:sldId id="282" r:id="rId15"/>
-    <p:sldId id="284" r:id="rId16"/>
-    <p:sldId id="286" r:id="rId17"/>
-    <p:sldId id="287" r:id="rId18"/>
-    <p:sldId id="288" r:id="rId19"/>
-    <p:sldId id="283" r:id="rId20"/>
-    <p:sldId id="270" r:id="rId21"/>
+    <p:sldId id="274" r:id="rId6"/>
+    <p:sldId id="275" r:id="rId7"/>
+    <p:sldId id="276" r:id="rId8"/>
+    <p:sldId id="277" r:id="rId9"/>
+    <p:sldId id="279" r:id="rId10"/>
+    <p:sldId id="281" r:id="rId11"/>
+    <p:sldId id="280" r:id="rId12"/>
+    <p:sldId id="278" r:id="rId13"/>
+    <p:sldId id="282" r:id="rId14"/>
+    <p:sldId id="284" r:id="rId15"/>
+    <p:sldId id="286" r:id="rId16"/>
+    <p:sldId id="287" r:id="rId17"/>
+    <p:sldId id="288" r:id="rId18"/>
+    <p:sldId id="283" r:id="rId19"/>
+    <p:sldId id="270" r:id="rId20"/>
   </p:sldIdLst>
   <p:sldSz cx="12192000" cy="6858000"/>
   <p:notesSz cx="6858000" cy="9144000"/>
@@ -216,7 +215,7 @@
           <a:p>
             <a:fld id="{2A4B08CC-DC44-4989-87E5-2A014D8E7470}" type="datetimeFigureOut">
               <a:rPr lang="en-US" smtClean="0"/>
-              <a:t>8/17/2020</a:t>
+              <a:t>3/30/2026</a:t>
             </a:fld>
             <a:endParaRPr lang="en-US"/>
           </a:p>
@@ -641,7 +640,7 @@
     </p:spTree>
     <p:extLst>
       <p:ext uri="{BB962C8B-B14F-4D97-AF65-F5344CB8AC3E}">
-        <p14:creationId xmlns:p14="http://schemas.microsoft.com/office/powerpoint/2010/main" val="1389579551"/>
+        <p14:creationId xmlns:p14="http://schemas.microsoft.com/office/powerpoint/2010/main" val="4134943319"/>
       </p:ext>
     </p:extLst>
   </p:cSld>
@@ -725,7 +724,7 @@
     </p:spTree>
     <p:extLst>
       <p:ext uri="{BB962C8B-B14F-4D97-AF65-F5344CB8AC3E}">
-        <p14:creationId xmlns:p14="http://schemas.microsoft.com/office/powerpoint/2010/main" val="4134943319"/>
+        <p14:creationId xmlns:p14="http://schemas.microsoft.com/office/powerpoint/2010/main" val="3391154988"/>
       </p:ext>
     </p:extLst>
   </p:cSld>
@@ -809,7 +808,7 @@
     </p:spTree>
     <p:extLst>
       <p:ext uri="{BB962C8B-B14F-4D97-AF65-F5344CB8AC3E}">
-        <p14:creationId xmlns:p14="http://schemas.microsoft.com/office/powerpoint/2010/main" val="3391154988"/>
+        <p14:creationId xmlns:p14="http://schemas.microsoft.com/office/powerpoint/2010/main" val="3748600390"/>
       </p:ext>
     </p:extLst>
   </p:cSld>
@@ -893,7 +892,7 @@
     </p:spTree>
     <p:extLst>
       <p:ext uri="{BB962C8B-B14F-4D97-AF65-F5344CB8AC3E}">
-        <p14:creationId xmlns:p14="http://schemas.microsoft.com/office/powerpoint/2010/main" val="3748600390"/>
+        <p14:creationId xmlns:p14="http://schemas.microsoft.com/office/powerpoint/2010/main" val="2589167856"/>
       </p:ext>
     </p:extLst>
   </p:cSld>
@@ -977,7 +976,7 @@
     </p:spTree>
     <p:extLst>
       <p:ext uri="{BB962C8B-B14F-4D97-AF65-F5344CB8AC3E}">
-        <p14:creationId xmlns:p14="http://schemas.microsoft.com/office/powerpoint/2010/main" val="2589167856"/>
+        <p14:creationId xmlns:p14="http://schemas.microsoft.com/office/powerpoint/2010/main" val="1181403482"/>
       </p:ext>
     </p:extLst>
   </p:cSld>
@@ -1061,7 +1060,7 @@
     </p:spTree>
     <p:extLst>
       <p:ext uri="{BB962C8B-B14F-4D97-AF65-F5344CB8AC3E}">
-        <p14:creationId xmlns:p14="http://schemas.microsoft.com/office/powerpoint/2010/main" val="1181403482"/>
+        <p14:creationId xmlns:p14="http://schemas.microsoft.com/office/powerpoint/2010/main" val="4141719367"/>
       </p:ext>
     </p:extLst>
   </p:cSld>
@@ -1145,7 +1144,7 @@
     </p:spTree>
     <p:extLst>
       <p:ext uri="{BB962C8B-B14F-4D97-AF65-F5344CB8AC3E}">
-        <p14:creationId xmlns:p14="http://schemas.microsoft.com/office/powerpoint/2010/main" val="4141719367"/>
+        <p14:creationId xmlns:p14="http://schemas.microsoft.com/office/powerpoint/2010/main" val="2100359323"/>
       </p:ext>
     </p:extLst>
   </p:cSld>
@@ -1221,90 +1220,6 @@
             <a:fld id="{C1523419-67C6-4F73-8B1A-F532E0D4A65B}" type="slidenum">
               <a:rPr lang="en-US" smtClean="0"/>
               <a:t>17</a:t>
-            </a:fld>
-            <a:endParaRPr lang="en-US"/>
-          </a:p>
-        </p:txBody>
-      </p:sp>
-    </p:spTree>
-    <p:extLst>
-      <p:ext uri="{BB962C8B-B14F-4D97-AF65-F5344CB8AC3E}">
-        <p14:creationId xmlns:p14="http://schemas.microsoft.com/office/powerpoint/2010/main" val="2100359323"/>
-      </p:ext>
-    </p:extLst>
-  </p:cSld>
-  <p:clrMapOvr>
-    <a:masterClrMapping/>
-  </p:clrMapOvr>
-</p:notes>
-</file>
-
-<file path=ppt/notesSlides/notesSlide18.xml><?xml version="1.0" encoding="utf-8"?>
-<p:notes xmlns:a="http://schemas.openxmlformats.org/drawingml/2006/main" xmlns:r="http://schemas.openxmlformats.org/officeDocument/2006/relationships" xmlns:p="http://schemas.openxmlformats.org/presentationml/2006/main">
-  <p:cSld>
-    <p:spTree>
-      <p:nvGrpSpPr>
-        <p:cNvPr id="1" name=""/>
-        <p:cNvGrpSpPr/>
-        <p:nvPr/>
-      </p:nvGrpSpPr>
-      <p:grpSpPr>
-        <a:xfrm>
-          <a:off x="0" y="0"/>
-          <a:ext cx="0" cy="0"/>
-          <a:chOff x="0" y="0"/>
-          <a:chExt cx="0" cy="0"/>
-        </a:xfrm>
-      </p:grpSpPr>
-      <p:sp>
-        <p:nvSpPr>
-          <p:cNvPr id="2" name="Slide Image Placeholder 1"/>
-          <p:cNvSpPr>
-            <a:spLocks noGrp="1" noRot="1" noChangeAspect="1"/>
-          </p:cNvSpPr>
-          <p:nvPr>
-            <p:ph type="sldImg"/>
-          </p:nvPr>
-        </p:nvSpPr>
-        <p:spPr/>
-      </p:sp>
-      <p:sp>
-        <p:nvSpPr>
-          <p:cNvPr id="3" name="Notes Placeholder 2"/>
-          <p:cNvSpPr>
-            <a:spLocks noGrp="1"/>
-          </p:cNvSpPr>
-          <p:nvPr>
-            <p:ph type="body" idx="1"/>
-          </p:nvPr>
-        </p:nvSpPr>
-        <p:spPr/>
-        <p:txBody>
-          <a:bodyPr/>
-          <a:lstStyle/>
-          <a:p>
-            <a:endParaRPr lang="en-GB"/>
-          </a:p>
-        </p:txBody>
-      </p:sp>
-      <p:sp>
-        <p:nvSpPr>
-          <p:cNvPr id="4" name="Slide Number Placeholder 3"/>
-          <p:cNvSpPr>
-            <a:spLocks noGrp="1"/>
-          </p:cNvSpPr>
-          <p:nvPr>
-            <p:ph type="sldNum" sz="quarter" idx="10"/>
-          </p:nvPr>
-        </p:nvSpPr>
-        <p:spPr/>
-        <p:txBody>
-          <a:bodyPr/>
-          <a:lstStyle/>
-          <a:p>
-            <a:fld id="{C1523419-67C6-4F73-8B1A-F532E0D4A65B}" type="slidenum">
-              <a:rPr lang="en-US" smtClean="0"/>
-              <a:t>18</a:t>
             </a:fld>
             <a:endParaRPr lang="en-US"/>
           </a:p>
@@ -1481,7 +1396,7 @@
     </p:spTree>
     <p:extLst>
       <p:ext uri="{BB962C8B-B14F-4D97-AF65-F5344CB8AC3E}">
-        <p14:creationId xmlns:p14="http://schemas.microsoft.com/office/powerpoint/2010/main" val="3243973628"/>
+        <p14:creationId xmlns:p14="http://schemas.microsoft.com/office/powerpoint/2010/main" val="3425664051"/>
       </p:ext>
     </p:extLst>
   </p:cSld>
@@ -1565,7 +1480,7 @@
     </p:spTree>
     <p:extLst>
       <p:ext uri="{BB962C8B-B14F-4D97-AF65-F5344CB8AC3E}">
-        <p14:creationId xmlns:p14="http://schemas.microsoft.com/office/powerpoint/2010/main" val="3425664051"/>
+        <p14:creationId xmlns:p14="http://schemas.microsoft.com/office/powerpoint/2010/main" val="2612504360"/>
       </p:ext>
     </p:extLst>
   </p:cSld>
@@ -1649,7 +1564,7 @@
     </p:spTree>
     <p:extLst>
       <p:ext uri="{BB962C8B-B14F-4D97-AF65-F5344CB8AC3E}">
-        <p14:creationId xmlns:p14="http://schemas.microsoft.com/office/powerpoint/2010/main" val="2612504360"/>
+        <p14:creationId xmlns:p14="http://schemas.microsoft.com/office/powerpoint/2010/main" val="3432957162"/>
       </p:ext>
     </p:extLst>
   </p:cSld>
@@ -1733,7 +1648,7 @@
     </p:spTree>
     <p:extLst>
       <p:ext uri="{BB962C8B-B14F-4D97-AF65-F5344CB8AC3E}">
-        <p14:creationId xmlns:p14="http://schemas.microsoft.com/office/powerpoint/2010/main" val="3432957162"/>
+        <p14:creationId xmlns:p14="http://schemas.microsoft.com/office/powerpoint/2010/main" val="595370250"/>
       </p:ext>
     </p:extLst>
   </p:cSld>
@@ -1817,7 +1732,7 @@
     </p:spTree>
     <p:extLst>
       <p:ext uri="{BB962C8B-B14F-4D97-AF65-F5344CB8AC3E}">
-        <p14:creationId xmlns:p14="http://schemas.microsoft.com/office/powerpoint/2010/main" val="595370250"/>
+        <p14:creationId xmlns:p14="http://schemas.microsoft.com/office/powerpoint/2010/main" val="1627485670"/>
       </p:ext>
     </p:extLst>
   </p:cSld>
@@ -1901,7 +1816,7 @@
     </p:spTree>
     <p:extLst>
       <p:ext uri="{BB962C8B-B14F-4D97-AF65-F5344CB8AC3E}">
-        <p14:creationId xmlns:p14="http://schemas.microsoft.com/office/powerpoint/2010/main" val="1627485670"/>
+        <p14:creationId xmlns:p14="http://schemas.microsoft.com/office/powerpoint/2010/main" val="2305156528"/>
       </p:ext>
     </p:extLst>
   </p:cSld>
@@ -1985,7 +1900,7 @@
     </p:spTree>
     <p:extLst>
       <p:ext uri="{BB962C8B-B14F-4D97-AF65-F5344CB8AC3E}">
-        <p14:creationId xmlns:p14="http://schemas.microsoft.com/office/powerpoint/2010/main" val="2305156528"/>
+        <p14:creationId xmlns:p14="http://schemas.microsoft.com/office/powerpoint/2010/main" val="1389579551"/>
       </p:ext>
     </p:extLst>
   </p:cSld>
@@ -7524,123 +7439,6 @@
           <a:p>
             <a:pPr algn="l"/>
             <a:r>
-              <a:rPr lang="en-US" dirty="0"/>
-              <a:t>sdkconsumers.sh &amp; sdkpublisher.sh</a:t>
-            </a:r>
-          </a:p>
-        </p:txBody>
-      </p:sp>
-      <p:pic>
-        <p:nvPicPr>
-          <p:cNvPr id="4" name="Picture 3">
-            <a:extLst>
-              <a:ext uri="{FF2B5EF4-FFF2-40B4-BE49-F238E27FC236}">
-                <a16:creationId xmlns:a16="http://schemas.microsoft.com/office/drawing/2014/main" id="{4C1E36C9-25EE-4062-A0A1-0A28EB9262FE}"/>
-              </a:ext>
-            </a:extLst>
-          </p:cNvPr>
-          <p:cNvPicPr>
-            <a:picLocks noChangeAspect="1"/>
-          </p:cNvPicPr>
-          <p:nvPr/>
-        </p:nvPicPr>
-        <p:blipFill>
-          <a:blip r:embed="rId3"/>
-          <a:stretch>
-            <a:fillRect/>
-          </a:stretch>
-        </p:blipFill>
-        <p:spPr>
-          <a:xfrm>
-            <a:off x="156151" y="922420"/>
-            <a:ext cx="7458075" cy="2886075"/>
-          </a:xfrm>
-          <a:prstGeom prst="rect">
-            <a:avLst/>
-          </a:prstGeom>
-        </p:spPr>
-      </p:pic>
-      <p:pic>
-        <p:nvPicPr>
-          <p:cNvPr id="5" name="Picture 4">
-            <a:extLst>
-              <a:ext uri="{FF2B5EF4-FFF2-40B4-BE49-F238E27FC236}">
-                <a16:creationId xmlns:a16="http://schemas.microsoft.com/office/drawing/2014/main" id="{2D0D55A6-A184-49B6-83DE-E0D615556BA8}"/>
-              </a:ext>
-            </a:extLst>
-          </p:cNvPr>
-          <p:cNvPicPr>
-            <a:picLocks noChangeAspect="1"/>
-          </p:cNvPicPr>
-          <p:nvPr/>
-        </p:nvPicPr>
-        <p:blipFill>
-          <a:blip r:embed="rId4"/>
-          <a:stretch>
-            <a:fillRect/>
-          </a:stretch>
-        </p:blipFill>
-        <p:spPr>
-          <a:xfrm>
-            <a:off x="4549199" y="3429000"/>
-            <a:ext cx="7486650" cy="2733675"/>
-          </a:xfrm>
-          <a:prstGeom prst="rect">
-            <a:avLst/>
-          </a:prstGeom>
-        </p:spPr>
-      </p:pic>
-    </p:spTree>
-    <p:extLst>
-      <p:ext uri="{BB962C8B-B14F-4D97-AF65-F5344CB8AC3E}">
-        <p14:creationId xmlns:p14="http://schemas.microsoft.com/office/powerpoint/2010/main" val="780953856"/>
-      </p:ext>
-    </p:extLst>
-  </p:cSld>
-  <p:clrMapOvr>
-    <a:masterClrMapping/>
-  </p:clrMapOvr>
-</p:sld>
-</file>
-
-<file path=ppt/slides/slide11.xml><?xml version="1.0" encoding="utf-8"?>
-<p:sld xmlns:a="http://schemas.openxmlformats.org/drawingml/2006/main" xmlns:r="http://schemas.openxmlformats.org/officeDocument/2006/relationships" xmlns:p="http://schemas.openxmlformats.org/presentationml/2006/main">
-  <p:cSld>
-    <p:spTree>
-      <p:nvGrpSpPr>
-        <p:cNvPr id="1" name=""/>
-        <p:cNvGrpSpPr/>
-        <p:nvPr/>
-      </p:nvGrpSpPr>
-      <p:grpSpPr>
-        <a:xfrm>
-          <a:off x="0" y="0"/>
-          <a:ext cx="0" cy="0"/>
-          <a:chOff x="0" y="0"/>
-          <a:chExt cx="0" cy="0"/>
-        </a:xfrm>
-      </p:grpSpPr>
-      <p:sp>
-        <p:nvSpPr>
-          <p:cNvPr id="2" name="Title 1"/>
-          <p:cNvSpPr>
-            <a:spLocks noGrp="1"/>
-          </p:cNvSpPr>
-          <p:nvPr>
-            <p:ph type="title"/>
-          </p:nvPr>
-        </p:nvSpPr>
-        <p:spPr>
-          <a:prstGeom prst="rect">
-            <a:avLst/>
-          </a:prstGeom>
-        </p:spPr>
-        <p:txBody>
-          <a:bodyPr/>
-          <a:lstStyle/>
-          <a:p>
-            <a:pPr algn="l"/>
-            <a:r>
               <a:rPr lang="en-US" dirty="0" err="1"/>
               <a:t>start_sdk.yaml</a:t>
             </a:r>
@@ -7955,7 +7753,7 @@
 </p:sld>
 </file>
 
-<file path=ppt/slides/slide12.xml><?xml version="1.0" encoding="utf-8"?>
+<file path=ppt/slides/slide11.xml><?xml version="1.0" encoding="utf-8"?>
 <p:sld xmlns:a="http://schemas.openxmlformats.org/drawingml/2006/main" xmlns:r="http://schemas.openxmlformats.org/officeDocument/2006/relationships" xmlns:p="http://schemas.openxmlformats.org/presentationml/2006/main">
   <p:cSld>
     <p:spTree>
@@ -8097,7 +7895,7 @@
 </p:sld>
 </file>
 
-<file path=ppt/slides/slide13.xml><?xml version="1.0" encoding="utf-8"?>
+<file path=ppt/slides/slide12.xml><?xml version="1.0" encoding="utf-8"?>
 <p:sld xmlns:a="http://schemas.openxmlformats.org/drawingml/2006/main" xmlns:r="http://schemas.openxmlformats.org/officeDocument/2006/relationships" xmlns:p="http://schemas.openxmlformats.org/presentationml/2006/main">
   <p:cSld>
     <p:spTree>
@@ -8308,7 +8106,7 @@
 </p:sld>
 </file>
 
-<file path=ppt/slides/slide14.xml><?xml version="1.0" encoding="utf-8"?>
+<file path=ppt/slides/slide13.xml><?xml version="1.0" encoding="utf-8"?>
 <p:sld xmlns:a="http://schemas.openxmlformats.org/drawingml/2006/main" xmlns:r="http://schemas.openxmlformats.org/officeDocument/2006/relationships" xmlns:p="http://schemas.openxmlformats.org/presentationml/2006/main">
   <p:cSld>
     <p:spTree>
@@ -8469,7 +8267,7 @@
 </p:sld>
 </file>
 
-<file path=ppt/slides/slide15.xml><?xml version="1.0" encoding="utf-8"?>
+<file path=ppt/slides/slide14.xml><?xml version="1.0" encoding="utf-8"?>
 <p:sld xmlns:a="http://schemas.openxmlformats.org/drawingml/2006/main" xmlns:r="http://schemas.openxmlformats.org/officeDocument/2006/relationships" xmlns:p="http://schemas.openxmlformats.org/presentationml/2006/main">
   <p:cSld>
     <p:spTree>
@@ -8618,7 +8416,7 @@
 </p:sld>
 </file>
 
-<file path=ppt/slides/slide16.xml><?xml version="1.0" encoding="utf-8"?>
+<file path=ppt/slides/slide15.xml><?xml version="1.0" encoding="utf-8"?>
 <p:sld xmlns:a="http://schemas.openxmlformats.org/drawingml/2006/main" xmlns:r="http://schemas.openxmlformats.org/officeDocument/2006/relationships" xmlns:p="http://schemas.openxmlformats.org/presentationml/2006/main">
   <p:cSld>
     <p:spTree>
@@ -8767,7 +8565,7 @@
 </p:sld>
 </file>
 
-<file path=ppt/slides/slide17.xml><?xml version="1.0" encoding="utf-8"?>
+<file path=ppt/slides/slide16.xml><?xml version="1.0" encoding="utf-8"?>
 <p:sld xmlns:a="http://schemas.openxmlformats.org/drawingml/2006/main" xmlns:r="http://schemas.openxmlformats.org/officeDocument/2006/relationships" xmlns:p="http://schemas.openxmlformats.org/presentationml/2006/main">
   <p:cSld>
     <p:spTree>
@@ -8924,7 +8722,7 @@
 </p:sld>
 </file>
 
-<file path=ppt/slides/slide18.xml><?xml version="1.0" encoding="utf-8"?>
+<file path=ppt/slides/slide17.xml><?xml version="1.0" encoding="utf-8"?>
 <p:sld xmlns:a="http://schemas.openxmlformats.org/drawingml/2006/main" xmlns:r="http://schemas.openxmlformats.org/officeDocument/2006/relationships" xmlns:p="http://schemas.openxmlformats.org/presentationml/2006/main">
   <p:cSld>
     <p:spTree>
@@ -9224,13 +9022,13 @@
           <a:p>
             <a:r>
               <a:rPr lang="en-US" sz="2400" dirty="0"/>
-              <a:t>The customer wants to know what kind of performance a broker can achieve on given infrastructure (on-prem/cloud)!</a:t>
+              <a:t>You want to know what kind of performance a broker can achieve on given infrastructure (on-prem/cloud)!</a:t>
             </a:r>
           </a:p>
           <a:p>
             <a:r>
               <a:rPr lang="en-US" sz="2400" dirty="0"/>
-              <a:t>Gathering a full set of performance metrics on a broker takes a lot of time:</a:t>
+              <a:t>Gathering a full set of performance metrics on a broker manually takes a lot of time:</a:t>
             </a:r>
           </a:p>
           <a:p>
@@ -9352,244 +9150,6 @@
       </p:grpSpPr>
       <p:sp>
         <p:nvSpPr>
-          <p:cNvPr id="2" name="Title 1"/>
-          <p:cNvSpPr>
-            <a:spLocks noGrp="1"/>
-          </p:cNvSpPr>
-          <p:nvPr>
-            <p:ph type="title"/>
-          </p:nvPr>
-        </p:nvSpPr>
-        <p:spPr>
-          <a:prstGeom prst="rect">
-            <a:avLst/>
-          </a:prstGeom>
-        </p:spPr>
-        <p:txBody>
-          <a:bodyPr/>
-          <a:lstStyle/>
-          <a:p>
-            <a:pPr algn="l"/>
-            <a:r>
-              <a:rPr lang="en-US" dirty="0"/>
-              <a:t>The Problem</a:t>
-            </a:r>
-          </a:p>
-        </p:txBody>
-      </p:sp>
-      <p:pic>
-        <p:nvPicPr>
-          <p:cNvPr id="6" name="Picture 5">
-            <a:extLst>
-              <a:ext uri="{FF2B5EF4-FFF2-40B4-BE49-F238E27FC236}">
-                <a16:creationId xmlns:a16="http://schemas.microsoft.com/office/drawing/2014/main" id="{A273FE74-6864-45C5-9F94-487978355BDA}"/>
-              </a:ext>
-            </a:extLst>
-          </p:cNvPr>
-          <p:cNvPicPr>
-            <a:picLocks noChangeAspect="1"/>
-          </p:cNvPicPr>
-          <p:nvPr/>
-        </p:nvPicPr>
-        <p:blipFill>
-          <a:blip r:embed="rId3"/>
-          <a:stretch>
-            <a:fillRect/>
-          </a:stretch>
-        </p:blipFill>
-        <p:spPr>
-          <a:xfrm>
-            <a:off x="0" y="1148817"/>
-            <a:ext cx="12192000" cy="4560366"/>
-          </a:xfrm>
-          <a:prstGeom prst="rect">
-            <a:avLst/>
-          </a:prstGeom>
-        </p:spPr>
-      </p:pic>
-      <p:pic>
-        <p:nvPicPr>
-          <p:cNvPr id="8" name="Picture 7">
-            <a:extLst>
-              <a:ext uri="{FF2B5EF4-FFF2-40B4-BE49-F238E27FC236}">
-                <a16:creationId xmlns:a16="http://schemas.microsoft.com/office/drawing/2014/main" id="{7F25C550-8D3E-4582-8FBB-19940850DB4E}"/>
-              </a:ext>
-            </a:extLst>
-          </p:cNvPr>
-          <p:cNvPicPr>
-            <a:picLocks noChangeAspect="1"/>
-          </p:cNvPicPr>
-          <p:nvPr/>
-        </p:nvPicPr>
-        <p:blipFill>
-          <a:blip r:embed="rId4"/>
-          <a:stretch>
-            <a:fillRect/>
-          </a:stretch>
-        </p:blipFill>
-        <p:spPr>
-          <a:xfrm>
-            <a:off x="3682175" y="286895"/>
-            <a:ext cx="5184989" cy="6042597"/>
-          </a:xfrm>
-          <a:prstGeom prst="rect">
-            <a:avLst/>
-          </a:prstGeom>
-        </p:spPr>
-      </p:pic>
-    </p:spTree>
-    <p:extLst>
-      <p:ext uri="{BB962C8B-B14F-4D97-AF65-F5344CB8AC3E}">
-        <p14:creationId xmlns:p14="http://schemas.microsoft.com/office/powerpoint/2010/main" val="840974193"/>
-      </p:ext>
-    </p:extLst>
-  </p:cSld>
-  <p:clrMapOvr>
-    <a:masterClrMapping/>
-  </p:clrMapOvr>
-  <p:timing>
-    <p:tnLst>
-      <p:par>
-        <p:cTn id="1" dur="indefinite" restart="never" nodeType="tmRoot">
-          <p:childTnLst>
-            <p:seq concurrent="1" nextAc="seek">
-              <p:cTn id="2" dur="indefinite" nodeType="mainSeq">
-                <p:childTnLst>
-                  <p:par>
-                    <p:cTn id="3" fill="hold">
-                      <p:stCondLst>
-                        <p:cond delay="indefinite"/>
-                      </p:stCondLst>
-                      <p:childTnLst>
-                        <p:par>
-                          <p:cTn id="4" fill="hold">
-                            <p:stCondLst>
-                              <p:cond delay="0"/>
-                            </p:stCondLst>
-                            <p:childTnLst>
-                              <p:par>
-                                <p:cTn id="5" presetID="2" presetClass="entr" presetSubtype="4" fill="hold" nodeType="clickEffect">
-                                  <p:stCondLst>
-                                    <p:cond delay="0"/>
-                                  </p:stCondLst>
-                                  <p:childTnLst>
-                                    <p:set>
-                                      <p:cBhvr>
-                                        <p:cTn id="6" dur="1" fill="hold">
-                                          <p:stCondLst>
-                                            <p:cond delay="0"/>
-                                          </p:stCondLst>
-                                        </p:cTn>
-                                        <p:tgtEl>
-                                          <p:spTgt spid="8"/>
-                                        </p:tgtEl>
-                                        <p:attrNameLst>
-                                          <p:attrName>style.visibility</p:attrName>
-                                        </p:attrNameLst>
-                                      </p:cBhvr>
-                                      <p:to>
-                                        <p:strVal val="visible"/>
-                                      </p:to>
-                                    </p:set>
-                                    <p:anim calcmode="lin" valueType="num">
-                                      <p:cBhvr additive="base">
-                                        <p:cTn id="7" dur="500" fill="hold"/>
-                                        <p:tgtEl>
-                                          <p:spTgt spid="8"/>
-                                        </p:tgtEl>
-                                        <p:attrNameLst>
-                                          <p:attrName>ppt_x</p:attrName>
-                                        </p:attrNameLst>
-                                      </p:cBhvr>
-                                      <p:tavLst>
-                                        <p:tav tm="0">
-                                          <p:val>
-                                            <p:strVal val="#ppt_x"/>
-                                          </p:val>
-                                        </p:tav>
-                                        <p:tav tm="100000">
-                                          <p:val>
-                                            <p:strVal val="#ppt_x"/>
-                                          </p:val>
-                                        </p:tav>
-                                      </p:tavLst>
-                                    </p:anim>
-                                    <p:anim calcmode="lin" valueType="num">
-                                      <p:cBhvr additive="base">
-                                        <p:cTn id="8" dur="500" fill="hold"/>
-                                        <p:tgtEl>
-                                          <p:spTgt spid="8"/>
-                                        </p:tgtEl>
-                                        <p:attrNameLst>
-                                          <p:attrName>ppt_y</p:attrName>
-                                        </p:attrNameLst>
-                                      </p:cBhvr>
-                                      <p:tavLst>
-                                        <p:tav tm="0">
-                                          <p:val>
-                                            <p:strVal val="1+#ppt_h/2"/>
-                                          </p:val>
-                                        </p:tav>
-                                        <p:tav tm="100000">
-                                          <p:val>
-                                            <p:strVal val="#ppt_y"/>
-                                          </p:val>
-                                        </p:tav>
-                                      </p:tavLst>
-                                    </p:anim>
-                                  </p:childTnLst>
-                                </p:cTn>
-                              </p:par>
-                            </p:childTnLst>
-                          </p:cTn>
-                        </p:par>
-                      </p:childTnLst>
-                    </p:cTn>
-                  </p:par>
-                </p:childTnLst>
-              </p:cTn>
-              <p:prevCondLst>
-                <p:cond evt="onPrev" delay="0">
-                  <p:tgtEl>
-                    <p:sldTgt/>
-                  </p:tgtEl>
-                </p:cond>
-              </p:prevCondLst>
-              <p:nextCondLst>
-                <p:cond evt="onNext" delay="0">
-                  <p:tgtEl>
-                    <p:sldTgt/>
-                  </p:tgtEl>
-                </p:cond>
-              </p:nextCondLst>
-            </p:seq>
-          </p:childTnLst>
-        </p:cTn>
-      </p:par>
-    </p:tnLst>
-  </p:timing>
-</p:sld>
-</file>
-
-<file path=ppt/slides/slide4.xml><?xml version="1.0" encoding="utf-8"?>
-<p:sld xmlns:a="http://schemas.openxmlformats.org/drawingml/2006/main" xmlns:r="http://schemas.openxmlformats.org/officeDocument/2006/relationships" xmlns:p="http://schemas.openxmlformats.org/presentationml/2006/main">
-  <p:cSld>
-    <p:spTree>
-      <p:nvGrpSpPr>
-        <p:cNvPr id="1" name=""/>
-        <p:cNvGrpSpPr/>
-        <p:nvPr/>
-      </p:nvGrpSpPr>
-      <p:grpSpPr>
-        <a:xfrm>
-          <a:off x="0" y="0"/>
-          <a:ext cx="0" cy="0"/>
-          <a:chOff x="0" y="0"/>
-          <a:chExt cx="0" cy="0"/>
-        </a:xfrm>
-      </p:grpSpPr>
-      <p:sp>
-        <p:nvSpPr>
           <p:cNvPr id="3" name="Content Placeholder 2"/>
           <p:cNvSpPr>
             <a:spLocks noGrp="1"/>
@@ -9753,7 +9313,7 @@
 </p:sld>
 </file>
 
-<file path=ppt/slides/slide5.xml><?xml version="1.0" encoding="utf-8"?>
+<file path=ppt/slides/slide4.xml><?xml version="1.0" encoding="utf-8"?>
 <p:sld xmlns:a="http://schemas.openxmlformats.org/drawingml/2006/main" xmlns:r="http://schemas.openxmlformats.org/officeDocument/2006/relationships" xmlns:p="http://schemas.openxmlformats.org/presentationml/2006/main">
   <p:cSld>
     <p:spTree>
@@ -11367,7 +10927,7 @@
 </p:sld>
 </file>
 
-<file path=ppt/slides/slide6.xml><?xml version="1.0" encoding="utf-8"?>
+<file path=ppt/slides/slide5.xml><?xml version="1.0" encoding="utf-8"?>
 <p:sld xmlns:a="http://schemas.openxmlformats.org/drawingml/2006/main" xmlns:r="http://schemas.openxmlformats.org/officeDocument/2006/relationships" xmlns:p="http://schemas.openxmlformats.org/presentationml/2006/main">
   <p:cSld>
     <p:spTree>
@@ -11683,7 +11243,7 @@
         <p:spPr bwMode="auto">
           <a:xfrm>
             <a:off x="581023" y="1186872"/>
-            <a:ext cx="2328432" cy="1999009"/>
+            <a:ext cx="2328432" cy="2289858"/>
           </a:xfrm>
           <a:prstGeom prst="rect">
             <a:avLst/>
@@ -11733,7 +11293,44 @@
               <a:rPr lang="en-GB" sz="1050" b="1" dirty="0">
                 <a:latin typeface="Arial" charset="0"/>
               </a:rPr>
-              <a:t>specific-test-sets/mytestset.sh</a:t>
+              <a:t>custom-sets/mytestset.sh</a:t>
+            </a:r>
+            <a:br>
+              <a:rPr lang="en-GB" sz="1050" b="1" dirty="0">
+                <a:latin typeface="Arial" charset="0"/>
+              </a:rPr>
+            </a:br>
+            <a:r>
+              <a:rPr lang="en-GB" sz="1050" b="1" dirty="0">
+                <a:latin typeface="Arial" charset="0"/>
+              </a:rPr>
+              <a:t>or</a:t>
+            </a:r>
+          </a:p>
+          <a:p>
+            <a:pPr marL="342900" marR="0" indent="-342900" algn="l" defTabSz="914400" rtl="0" eaLnBrk="1" fontAlgn="base" latinLnBrk="0" hangingPunct="1">
+              <a:lnSpc>
+                <a:spcPct val="80000"/>
+              </a:lnSpc>
+              <a:spcBef>
+                <a:spcPct val="20000"/>
+              </a:spcBef>
+              <a:spcAft>
+                <a:spcPct val="0"/>
+              </a:spcAft>
+              <a:buClr>
+                <a:schemeClr val="hlink"/>
+              </a:buClr>
+              <a:buSzPct val="60000"/>
+              <a:buFont typeface="Arial Narrow" pitchFamily="34" charset="0"/>
+              <a:buNone/>
+              <a:tabLst/>
+            </a:pPr>
+            <a:r>
+              <a:rPr lang="en-GB" sz="1050" b="1" dirty="0">
+                <a:latin typeface="Arial" charset="0"/>
+              </a:rPr>
+              <a:t>benchmarking-tests/*.sh</a:t>
             </a:r>
           </a:p>
           <a:p>
@@ -12116,7 +11713,7 @@
         </p:nvSpPr>
         <p:spPr bwMode="auto">
           <a:xfrm>
-            <a:off x="581023" y="3731409"/>
+            <a:off x="581023" y="4036222"/>
             <a:ext cx="2328432" cy="1514261"/>
           </a:xfrm>
           <a:prstGeom prst="rect">
@@ -12167,7 +11764,7 @@
               <a:rPr lang="en-GB" sz="1050" b="1" dirty="0">
                 <a:latin typeface="Arial" charset="0"/>
               </a:rPr>
-              <a:t>runtestset.sh</a:t>
+              <a:t>engine/runtestset.sh</a:t>
             </a:r>
           </a:p>
           <a:p>
@@ -12361,7 +11958,7 @@
         </p:nvSpPr>
         <p:spPr bwMode="auto">
           <a:xfrm>
-            <a:off x="3464070" y="3981069"/>
+            <a:off x="3464070" y="4285882"/>
             <a:ext cx="2236067" cy="1191095"/>
           </a:xfrm>
           <a:prstGeom prst="rect">
@@ -12412,7 +12009,7 @@
               <a:rPr lang="en-GB" sz="1050" b="1" dirty="0">
                 <a:latin typeface="Arial" charset="0"/>
               </a:rPr>
-              <a:t>run-tests.sh</a:t>
+              <a:t>engine/run-tests.sh</a:t>
             </a:r>
           </a:p>
           <a:p>
@@ -12602,7 +12199,7 @@
         </p:nvSpPr>
         <p:spPr bwMode="auto">
           <a:xfrm>
-            <a:off x="1407894" y="3185881"/>
+            <a:off x="1407894" y="3490694"/>
             <a:ext cx="674689" cy="545528"/>
           </a:xfrm>
           <a:prstGeom prst="downArrow">
@@ -12676,7 +12273,7 @@
         </p:nvSpPr>
         <p:spPr bwMode="auto">
           <a:xfrm>
-            <a:off x="2909022" y="4119085"/>
+            <a:off x="2909022" y="4423898"/>
             <a:ext cx="555047" cy="687808"/>
           </a:xfrm>
           <a:prstGeom prst="rightArrow">
@@ -12801,7 +12398,7 @@
               <a:rPr lang="en-GB" sz="1050" b="1" dirty="0">
                 <a:latin typeface="Arial" charset="0"/>
               </a:rPr>
-              <a:t>start-</a:t>
+              <a:t>engine/start-</a:t>
             </a:r>
             <a:r>
               <a:rPr lang="en-GB" sz="1050" b="1" dirty="0" err="1">
@@ -14096,8 +13693,8 @@
         </p:nvSpPr>
         <p:spPr bwMode="auto">
           <a:xfrm rot="10800000">
-            <a:off x="3943276" y="3656777"/>
-            <a:ext cx="674688" cy="340779"/>
+            <a:off x="3943277" y="3667842"/>
+            <a:ext cx="674688" cy="576000"/>
           </a:xfrm>
           <a:prstGeom prst="downArrow">
             <a:avLst/>
@@ -14169,7 +13766,7 @@
 </p:sld>
 </file>
 
-<file path=ppt/slides/slide7.xml><?xml version="1.0" encoding="utf-8"?>
+<file path=ppt/slides/slide6.xml><?xml version="1.0" encoding="utf-8"?>
 <p:sld xmlns:a="http://schemas.openxmlformats.org/drawingml/2006/main" xmlns:r="http://schemas.openxmlformats.org/officeDocument/2006/relationships" xmlns:p="http://schemas.openxmlformats.org/presentationml/2006/main">
   <p:cSld>
     <p:spTree>
@@ -14286,7 +13883,7 @@
 </p:sld>
 </file>
 
-<file path=ppt/slides/slide8.xml><?xml version="1.0" encoding="utf-8"?>
+<file path=ppt/slides/slide7.xml><?xml version="1.0" encoding="utf-8"?>
 <p:sld xmlns:a="http://schemas.openxmlformats.org/drawingml/2006/main" xmlns:r="http://schemas.openxmlformats.org/officeDocument/2006/relationships" xmlns:p="http://schemas.openxmlformats.org/presentationml/2006/main">
   <p:cSld>
     <p:spTree>
@@ -14373,7 +13970,7 @@
 </p:sld>
 </file>
 
-<file path=ppt/slides/slide9.xml><?xml version="1.0" encoding="utf-8"?>
+<file path=ppt/slides/slide8.xml><?xml version="1.0" encoding="utf-8"?>
 <p:sld xmlns:a="http://schemas.openxmlformats.org/drawingml/2006/main" xmlns:r="http://schemas.openxmlformats.org/officeDocument/2006/relationships" xmlns:p="http://schemas.openxmlformats.org/presentationml/2006/main">
   <p:cSld>
     <p:spTree>
@@ -14451,6 +14048,123 @@
     <p:extLst>
       <p:ext uri="{BB962C8B-B14F-4D97-AF65-F5344CB8AC3E}">
         <p14:creationId xmlns:p14="http://schemas.microsoft.com/office/powerpoint/2010/main" val="1942893860"/>
+      </p:ext>
+    </p:extLst>
+  </p:cSld>
+  <p:clrMapOvr>
+    <a:masterClrMapping/>
+  </p:clrMapOvr>
+</p:sld>
+</file>
+
+<file path=ppt/slides/slide9.xml><?xml version="1.0" encoding="utf-8"?>
+<p:sld xmlns:a="http://schemas.openxmlformats.org/drawingml/2006/main" xmlns:r="http://schemas.openxmlformats.org/officeDocument/2006/relationships" xmlns:p="http://schemas.openxmlformats.org/presentationml/2006/main">
+  <p:cSld>
+    <p:spTree>
+      <p:nvGrpSpPr>
+        <p:cNvPr id="1" name=""/>
+        <p:cNvGrpSpPr/>
+        <p:nvPr/>
+      </p:nvGrpSpPr>
+      <p:grpSpPr>
+        <a:xfrm>
+          <a:off x="0" y="0"/>
+          <a:ext cx="0" cy="0"/>
+          <a:chOff x="0" y="0"/>
+          <a:chExt cx="0" cy="0"/>
+        </a:xfrm>
+      </p:grpSpPr>
+      <p:sp>
+        <p:nvSpPr>
+          <p:cNvPr id="2" name="Title 1"/>
+          <p:cNvSpPr>
+            <a:spLocks noGrp="1"/>
+          </p:cNvSpPr>
+          <p:nvPr>
+            <p:ph type="title"/>
+          </p:nvPr>
+        </p:nvSpPr>
+        <p:spPr>
+          <a:prstGeom prst="rect">
+            <a:avLst/>
+          </a:prstGeom>
+        </p:spPr>
+        <p:txBody>
+          <a:bodyPr/>
+          <a:lstStyle/>
+          <a:p>
+            <a:pPr algn="l"/>
+            <a:r>
+              <a:rPr lang="en-US" dirty="0"/>
+              <a:t>sdkconsumers.sh &amp; sdkpublisher.sh</a:t>
+            </a:r>
+          </a:p>
+        </p:txBody>
+      </p:sp>
+      <p:pic>
+        <p:nvPicPr>
+          <p:cNvPr id="4" name="Picture 3">
+            <a:extLst>
+              <a:ext uri="{FF2B5EF4-FFF2-40B4-BE49-F238E27FC236}">
+                <a16:creationId xmlns:a16="http://schemas.microsoft.com/office/drawing/2014/main" id="{4C1E36C9-25EE-4062-A0A1-0A28EB9262FE}"/>
+              </a:ext>
+            </a:extLst>
+          </p:cNvPr>
+          <p:cNvPicPr>
+            <a:picLocks noChangeAspect="1"/>
+          </p:cNvPicPr>
+          <p:nvPr/>
+        </p:nvPicPr>
+        <p:blipFill>
+          <a:blip r:embed="rId3"/>
+          <a:stretch>
+            <a:fillRect/>
+          </a:stretch>
+        </p:blipFill>
+        <p:spPr>
+          <a:xfrm>
+            <a:off x="156151" y="922420"/>
+            <a:ext cx="7458075" cy="2886075"/>
+          </a:xfrm>
+          <a:prstGeom prst="rect">
+            <a:avLst/>
+          </a:prstGeom>
+        </p:spPr>
+      </p:pic>
+      <p:pic>
+        <p:nvPicPr>
+          <p:cNvPr id="5" name="Picture 4">
+            <a:extLst>
+              <a:ext uri="{FF2B5EF4-FFF2-40B4-BE49-F238E27FC236}">
+                <a16:creationId xmlns:a16="http://schemas.microsoft.com/office/drawing/2014/main" id="{2D0D55A6-A184-49B6-83DE-E0D615556BA8}"/>
+              </a:ext>
+            </a:extLst>
+          </p:cNvPr>
+          <p:cNvPicPr>
+            <a:picLocks noChangeAspect="1"/>
+          </p:cNvPicPr>
+          <p:nvPr/>
+        </p:nvPicPr>
+        <p:blipFill>
+          <a:blip r:embed="rId4"/>
+          <a:stretch>
+            <a:fillRect/>
+          </a:stretch>
+        </p:blipFill>
+        <p:spPr>
+          <a:xfrm>
+            <a:off x="4549199" y="3429000"/>
+            <a:ext cx="7486650" cy="2733675"/>
+          </a:xfrm>
+          <a:prstGeom prst="rect">
+            <a:avLst/>
+          </a:prstGeom>
+        </p:spPr>
+      </p:pic>
+    </p:spTree>
+    <p:extLst>
+      <p:ext uri="{BB962C8B-B14F-4D97-AF65-F5344CB8AC3E}">
+        <p14:creationId xmlns:p14="http://schemas.microsoft.com/office/powerpoint/2010/main" val="780953856"/>
       </p:ext>
     </p:extLst>
   </p:cSld>
